--- a/assets/powerpoints/module-n8-habitation/A2-la-meme-phrase-trois-intentions.pptx
+++ b/assets/powerpoints/module-n8-habitation/A2-la-meme-phrase-trois-intentions.pptx
@@ -7024,7 +7024,7 @@
                 </a:solidFill>
                 <a:latin typeface="Verdana"/>
               </a:rPr>
-              <a:t>Trois mélodies, trois repères</a:t>
+              <a:t>Quatre courbes, quatre repères</a:t>
             </a:r>
           </a:p>
         </p:txBody>
@@ -7142,13 +7142,13 @@
               </a:lnSpc>
             </a:pPr>
             <a:r>
-              <a:rPr sz="1500" b="0" i="0">
+              <a:rPr sz="1400" b="0" i="0">
                 <a:solidFill>
                   <a:srgbClr val="3A3D40"/>
                 </a:solidFill>
                 <a:latin typeface="Verdana"/>
               </a:rPr>
-              <a:t>La voix monte d'un coup sur les deux ou trois dernières syllabes. Souvent une question courte, souvent introduite par « comment ça ». « Vous me dites que le drain n'a pas été entretenu ? »</a:t>
+              <a:t>Les premiers mots sont plats, puis les deux ou trois dernières syllabes montent d'un coup, comme une marche. « Vous me dites que le drain n'a pas été entretenu ? »</a:t>
             </a:r>
           </a:p>
         </p:txBody>
@@ -7266,13 +7266,13 @@
               </a:lnSpc>
             </a:pPr>
             <a:r>
-              <a:rPr sz="1500" b="0" i="0">
+              <a:rPr sz="1400" b="0" i="0">
                 <a:solidFill>
                   <a:srgbClr val="3A3D40"/>
                 </a:solidFill>
                 <a:latin typeface="Verdana"/>
               </a:rPr>
-              <a:t>On ne monte pas : on freine. Le débit se casse à l'endroit où le fil s'est rompu, avec un petit silence avant le mot en cause. « Excusez-moi, le mot exclusion… vous l'employez comment ? »</a:t>
+              <a:t>Rien ne monte : le débit traîne exactement là où vous avez décroché, avec un blanc juste avant le mot en cause. « Excusez-moi, le mot exclusion… vous l'employez comment ? »</a:t>
             </a:r>
           </a:p>
         </p:txBody>
@@ -7390,13 +7390,13 @@
               </a:lnSpc>
             </a:pPr>
             <a:r>
-              <a:rPr sz="1500" b="0" i="0">
+              <a:rPr sz="1400" b="0" i="0">
                 <a:solidFill>
                   <a:srgbClr val="3A3D40"/>
                 </a:solidFill>
                 <a:latin typeface="Verdana"/>
               </a:rPr>
-              <a:t>La mélodie descend, le débit ralentit, les syllabes se détachent. C'est la voix de l'engagement, et celle d'une contestation. « Je veux une réponse écrite, et je l'aurai. »</a:t>
+              <a:t>La courbe va vers le bas, les syllabes se séparent, et on marque une pause avant le dernier groupe. C'est la voix d'une décision déjà prise. « Je veux une réponse écrite, et je l'aurai. »</a:t>
             </a:r>
           </a:p>
         </p:txBody>
@@ -7514,13 +7514,13 @@
               </a:lnSpc>
             </a:pPr>
             <a:r>
-              <a:rPr sz="1500" b="0" i="0">
+              <a:rPr sz="1400" b="0" i="0">
                 <a:solidFill>
                   <a:srgbClr val="3A3D40"/>
                 </a:solidFill>
                 <a:latin typeface="Verdana"/>
               </a:rPr>
-              <a:t>La quatrième, surtout utile à reconnaître chez l'autre : la voix tombe dès la première syllabe et ne remonte jamais. « Ah. Je pensais que la facture était au dossier. »</a:t>
+              <a:t>La quatrième, celle qu'on entend chez l'autre : ça descend dès la première syllabe et ça ne se relève jamais. « Ah. Je pensais que la facture était au dossier. »</a:t>
             </a:r>
           </a:p>
         </p:txBody>
